--- a/260418_add/ppt/Fig1_study_design_headline_native_editable.pptx
+++ b/260418_add/ppt/Fig1_study_design_headline_native_editable.pptx
@@ -3135,8 +3135,8 @@
         </p:nvSpPr>
         <p:spPr>
           <a:xfrm>
-            <a:off x="137160" y="877824"/>
-            <a:ext cx="868680" cy="164592"/>
+            <a:off x="137160" y="749808"/>
+            <a:ext cx="868680" cy="128016"/>
           </a:xfrm>
           <a:prstGeom prst="rect">
             <a:avLst/>
@@ -3171,8 +3171,8 @@
         </p:nvSpPr>
         <p:spPr>
           <a:xfrm>
-            <a:off x="137160" y="987552"/>
-            <a:ext cx="868680" cy="164592"/>
+            <a:off x="137160" y="859536"/>
+            <a:ext cx="868680" cy="128016"/>
           </a:xfrm>
           <a:prstGeom prst="rect">
             <a:avLst/>
@@ -3194,7 +3194,7 @@
                 </a:solidFill>
                 <a:latin typeface="Arial"/>
               </a:rPr>
-              <a:t>TNT (N = 35)</a:t>
+              <a:t>SC-RT TNT (N = 35)</a:t>
             </a:r>
           </a:p>
         </p:txBody>
@@ -3207,8 +3207,8 @@
         </p:nvSpPr>
         <p:spPr>
           <a:xfrm>
-            <a:off x="137160" y="2615184"/>
-            <a:ext cx="868680" cy="164592"/>
+            <a:off x="137160" y="1572768"/>
+            <a:ext cx="868680" cy="128016"/>
           </a:xfrm>
           <a:prstGeom prst="rect">
             <a:avLst/>
@@ -3230,7 +3230,7 @@
                 </a:solidFill>
                 <a:latin typeface="Arial"/>
               </a:rPr>
-              <a:t>External</a:t>
+              <a:t>External · SC-RT</a:t>
             </a:r>
           </a:p>
         </p:txBody>
@@ -3243,8 +3243,80 @@
         </p:nvSpPr>
         <p:spPr>
           <a:xfrm>
-            <a:off x="137160" y="2724912"/>
-            <a:ext cx="868680" cy="164592"/>
+            <a:off x="137160" y="1682496"/>
+            <a:ext cx="868680" cy="128016"/>
+          </a:xfrm>
+          <a:prstGeom prst="rect">
+            <a:avLst/>
+          </a:prstGeom>
+          <a:noFill/>
+          <a:effectLst/>
+        </p:spPr>
+        <p:txBody>
+          <a:bodyPr wrap="square" lIns="0" rIns="0" tIns="0" bIns="0" anchor="ctr">
+            <a:spAutoFit/>
+          </a:bodyPr>
+          <a:lstStyle/>
+          <a:p>
+            <a:pPr algn="l"/>
+            <a:r>
+              <a:rPr sz="700" b="1" i="0">
+                <a:solidFill>
+                  <a:srgbClr val="D4A300"/>
+                </a:solidFill>
+                <a:latin typeface="Arial"/>
+              </a:rPr>
+              <a:t>GSE254249 (N = 8)</a:t>
+            </a:r>
+          </a:p>
+        </p:txBody>
+      </p:sp>
+      <p:sp>
+        <p:nvSpPr>
+          <p:cNvPr id="7" name="TextBox 6"/>
+          <p:cNvSpPr txBox="1"/>
+          <p:nvPr/>
+        </p:nvSpPr>
+        <p:spPr>
+          <a:xfrm>
+            <a:off x="137160" y="2395728"/>
+            <a:ext cx="868680" cy="128016"/>
+          </a:xfrm>
+          <a:prstGeom prst="rect">
+            <a:avLst/>
+          </a:prstGeom>
+          <a:noFill/>
+          <a:effectLst/>
+        </p:spPr>
+        <p:txBody>
+          <a:bodyPr wrap="square" lIns="0" rIns="0" tIns="0" bIns="0" anchor="ctr">
+            <a:spAutoFit/>
+          </a:bodyPr>
+          <a:lstStyle/>
+          <a:p>
+            <a:pPr algn="l"/>
+            <a:r>
+              <a:rPr sz="600" b="1" i="0">
+                <a:solidFill>
+                  <a:srgbClr val="222222"/>
+                </a:solidFill>
+                <a:latin typeface="Arial"/>
+              </a:rPr>
+              <a:t>External · LC-CRT</a:t>
+            </a:r>
+          </a:p>
+        </p:txBody>
+      </p:sp>
+      <p:sp>
+        <p:nvSpPr>
+          <p:cNvPr id="8" name="TextBox 7"/>
+          <p:cNvSpPr txBox="1"/>
+          <p:nvPr/>
+        </p:nvSpPr>
+        <p:spPr>
+          <a:xfrm>
+            <a:off x="137160" y="2505456"/>
+            <a:ext cx="868680" cy="128016"/>
           </a:xfrm>
           <a:prstGeom prst="rect">
             <a:avLst/>
@@ -3266,21 +3338,57 @@
                 </a:solidFill>
                 <a:latin typeface="Arial"/>
               </a:rPr>
-              <a:t>nCRT-long (N = 518)</a:t>
+              <a:t>5 GEO + Akiyoshi</a:t>
             </a:r>
           </a:p>
         </p:txBody>
       </p:sp>
       <p:sp>
         <p:nvSpPr>
-          <p:cNvPr id="7" name="Rectangle 6"/>
-          <p:cNvSpPr/>
-          <p:nvPr/>
-        </p:nvSpPr>
-        <p:spPr>
-          <a:xfrm>
-            <a:off x="1618488" y="822960"/>
-            <a:ext cx="2048256" cy="329184"/>
+          <p:cNvPr id="9" name="TextBox 8"/>
+          <p:cNvSpPr txBox="1"/>
+          <p:nvPr/>
+        </p:nvSpPr>
+        <p:spPr>
+          <a:xfrm>
+            <a:off x="137160" y="2615184"/>
+            <a:ext cx="868680" cy="109728"/>
+          </a:xfrm>
+          <a:prstGeom prst="rect">
+            <a:avLst/>
+          </a:prstGeom>
+          <a:noFill/>
+          <a:effectLst/>
+        </p:spPr>
+        <p:txBody>
+          <a:bodyPr wrap="square" lIns="0" rIns="0" tIns="0" bIns="0" anchor="ctr">
+            <a:spAutoFit/>
+          </a:bodyPr>
+          <a:lstStyle/>
+          <a:p>
+            <a:pPr algn="l"/>
+            <a:r>
+              <a:rPr sz="600" b="0" i="0">
+                <a:solidFill>
+                  <a:srgbClr val="8A2B4C"/>
+                </a:solidFill>
+                <a:latin typeface="Arial"/>
+              </a:rPr>
+              <a:t>(N = 518–816)</a:t>
+            </a:r>
+          </a:p>
+        </p:txBody>
+      </p:sp>
+      <p:sp>
+        <p:nvSpPr>
+          <p:cNvPr id="10" name="Rectangle 9"/>
+          <p:cNvSpPr/>
+          <p:nvPr/>
+        </p:nvSpPr>
+        <p:spPr>
+          <a:xfrm>
+            <a:off x="1837944" y="731520"/>
+            <a:ext cx="1664208" cy="274320"/>
           </a:xfrm>
           <a:prstGeom prst="rect">
             <a:avLst/>
@@ -3319,14 +3427,14 @@
       </p:sp>
       <p:sp>
         <p:nvSpPr>
-          <p:cNvPr id="8" name="TextBox 7"/>
+          <p:cNvPr id="11" name="TextBox 10"/>
           <p:cNvSpPr txBox="1"/>
           <p:nvPr/>
         </p:nvSpPr>
         <p:spPr>
           <a:xfrm>
-            <a:off x="1618488" y="905256"/>
-            <a:ext cx="2048256" cy="164592"/>
+            <a:off x="1837944" y="786384"/>
+            <a:ext cx="1664208" cy="164592"/>
           </a:xfrm>
           <a:prstGeom prst="rect">
             <a:avLst/>
@@ -3348,21 +3456,21 @@
                 </a:solidFill>
                 <a:latin typeface="Arial"/>
               </a:rPr>
-              <a:t>Radiation phase · 50.4 Gy / 28 fx · RT alone</a:t>
+              <a:t>SC-RT · 25 Gy / 5 Fx · RT alone</a:t>
             </a:r>
           </a:p>
         </p:txBody>
       </p:sp>
       <p:sp>
         <p:nvSpPr>
-          <p:cNvPr id="9" name="Rectangle 8"/>
-          <p:cNvSpPr/>
-          <p:nvPr/>
-        </p:nvSpPr>
-        <p:spPr>
-          <a:xfrm>
-            <a:off x="3666744" y="822960"/>
-            <a:ext cx="1024128" cy="329184"/>
+          <p:cNvPr id="12" name="Rectangle 11"/>
+          <p:cNvSpPr/>
+          <p:nvPr/>
+        </p:nvSpPr>
+        <p:spPr>
+          <a:xfrm>
+            <a:off x="3502152" y="731520"/>
+            <a:ext cx="832104" cy="274320"/>
           </a:xfrm>
           <a:prstGeom prst="rect">
             <a:avLst/>
@@ -3401,14 +3509,14 @@
       </p:sp>
       <p:sp>
         <p:nvSpPr>
-          <p:cNvPr id="10" name="TextBox 9"/>
+          <p:cNvPr id="13" name="TextBox 12"/>
           <p:cNvSpPr txBox="1"/>
           <p:nvPr/>
         </p:nvSpPr>
         <p:spPr>
           <a:xfrm>
-            <a:off x="3666744" y="905256"/>
-            <a:ext cx="1024128" cy="164592"/>
+            <a:off x="3502152" y="786384"/>
+            <a:ext cx="832104" cy="164592"/>
           </a:xfrm>
           <a:prstGeom prst="rect">
             <a:avLst/>
@@ -3437,14 +3545,14 @@
       </p:sp>
       <p:sp>
         <p:nvSpPr>
-          <p:cNvPr id="11" name="Rectangle 10"/>
-          <p:cNvSpPr/>
-          <p:nvPr/>
-        </p:nvSpPr>
-        <p:spPr>
-          <a:xfrm>
-            <a:off x="4690872" y="822960"/>
-            <a:ext cx="1024128" cy="329184"/>
+          <p:cNvPr id="14" name="Rectangle 13"/>
+          <p:cNvSpPr/>
+          <p:nvPr/>
+        </p:nvSpPr>
+        <p:spPr>
+          <a:xfrm>
+            <a:off x="4334256" y="731520"/>
+            <a:ext cx="832104" cy="274320"/>
           </a:xfrm>
           <a:prstGeom prst="rect">
             <a:avLst/>
@@ -3483,14 +3591,14 @@
       </p:sp>
       <p:sp>
         <p:nvSpPr>
-          <p:cNvPr id="12" name="TextBox 11"/>
+          <p:cNvPr id="15" name="TextBox 14"/>
           <p:cNvSpPr txBox="1"/>
           <p:nvPr/>
         </p:nvSpPr>
         <p:spPr>
           <a:xfrm>
-            <a:off x="4709160" y="905256"/>
-            <a:ext cx="1024128" cy="164592"/>
+            <a:off x="4352544" y="786384"/>
+            <a:ext cx="832104" cy="164592"/>
           </a:xfrm>
           <a:prstGeom prst="rect">
             <a:avLst/>
@@ -3519,14 +3627,14 @@
       </p:sp>
       <p:sp>
         <p:nvSpPr>
-          <p:cNvPr id="13" name="Rectangle 12"/>
-          <p:cNvSpPr/>
-          <p:nvPr/>
-        </p:nvSpPr>
-        <p:spPr>
-          <a:xfrm>
-            <a:off x="1618488" y="2560320"/>
-            <a:ext cx="2048256" cy="329184"/>
+          <p:cNvPr id="16" name="Rectangle 15"/>
+          <p:cNvSpPr/>
+          <p:nvPr/>
+        </p:nvSpPr>
+        <p:spPr>
+          <a:xfrm>
+            <a:off x="1837944" y="1554480"/>
+            <a:ext cx="1664208" cy="274320"/>
           </a:xfrm>
           <a:prstGeom prst="rect">
             <a:avLst/>
@@ -3565,14 +3673,14 @@
       </p:sp>
       <p:sp>
         <p:nvSpPr>
-          <p:cNvPr id="14" name="TextBox 13"/>
+          <p:cNvPr id="17" name="TextBox 16"/>
           <p:cNvSpPr txBox="1"/>
           <p:nvPr/>
         </p:nvSpPr>
         <p:spPr>
           <a:xfrm>
-            <a:off x="1618488" y="2642616"/>
-            <a:ext cx="2048256" cy="164592"/>
+            <a:off x="1837944" y="1609344"/>
+            <a:ext cx="1664208" cy="164592"/>
           </a:xfrm>
           <a:prstGeom prst="rect">
             <a:avLst/>
@@ -3594,21 +3702,103 @@
                 </a:solidFill>
                 <a:latin typeface="Arial"/>
               </a:rPr>
-              <a:t>Radiation phase · 50.4 Gy · RT + concurrent capecitabine</a:t>
+              <a:t>SC-RT · 25 Gy / 5 Fx</a:t>
             </a:r>
           </a:p>
         </p:txBody>
       </p:sp>
       <p:sp>
         <p:nvSpPr>
-          <p:cNvPr id="15" name="Rectangle 14"/>
-          <p:cNvSpPr/>
-          <p:nvPr/>
-        </p:nvSpPr>
-        <p:spPr>
-          <a:xfrm>
-            <a:off x="3666744" y="2560320"/>
-            <a:ext cx="2048256" cy="329184"/>
+          <p:cNvPr id="18" name="Rectangle 17"/>
+          <p:cNvSpPr/>
+          <p:nvPr/>
+        </p:nvSpPr>
+        <p:spPr>
+          <a:xfrm>
+            <a:off x="3502152" y="1554480"/>
+            <a:ext cx="832104" cy="274320"/>
+          </a:xfrm>
+          <a:prstGeom prst="rect">
+            <a:avLst/>
+          </a:prstGeom>
+          <a:solidFill>
+            <a:srgbClr val="A6622C"/>
+          </a:solidFill>
+          <a:ln w="6350">
+            <a:solidFill>
+              <a:srgbClr val="FFFFFF"/>
+            </a:solidFill>
+          </a:ln>
+          <a:effectLst/>
+        </p:spPr>
+        <p:style>
+          <a:lnRef idx="1">
+            <a:schemeClr val="accent1"/>
+          </a:lnRef>
+          <a:fillRef idx="3">
+            <a:schemeClr val="accent1"/>
+          </a:fillRef>
+          <a:effectRef idx="2">
+            <a:schemeClr val="accent1"/>
+          </a:effectRef>
+          <a:fontRef idx="minor">
+            <a:schemeClr val="lt1"/>
+          </a:fontRef>
+        </p:style>
+        <p:txBody>
+          <a:bodyPr rtlCol="0" anchor="ctr"/>
+          <a:lstStyle/>
+          <a:p>
+            <a:pPr algn="ctr"/>
+          </a:p>
+        </p:txBody>
+      </p:sp>
+      <p:sp>
+        <p:nvSpPr>
+          <p:cNvPr id="19" name="TextBox 18"/>
+          <p:cNvSpPr txBox="1"/>
+          <p:nvPr/>
+        </p:nvSpPr>
+        <p:spPr>
+          <a:xfrm>
+            <a:off x="3502152" y="1609344"/>
+            <a:ext cx="832104" cy="164592"/>
+          </a:xfrm>
+          <a:prstGeom prst="rect">
+            <a:avLst/>
+          </a:prstGeom>
+          <a:noFill/>
+          <a:effectLst/>
+        </p:spPr>
+        <p:txBody>
+          <a:bodyPr wrap="square" lIns="0" rIns="0" tIns="0" bIns="0" anchor="ctr">
+            <a:spAutoFit/>
+          </a:bodyPr>
+          <a:lstStyle/>
+          <a:p>
+            <a:pPr algn="ctr"/>
+            <a:r>
+              <a:rPr sz="700" b="1" i="0">
+                <a:solidFill>
+                  <a:srgbClr val="FFFFFF"/>
+                </a:solidFill>
+                <a:latin typeface="Arial"/>
+              </a:rPr>
+              <a:t>Consolidation · FOLFOXIRI (3-drug)</a:t>
+            </a:r>
+          </a:p>
+        </p:txBody>
+      </p:sp>
+      <p:sp>
+        <p:nvSpPr>
+          <p:cNvPr id="20" name="Rectangle 19"/>
+          <p:cNvSpPr/>
+          <p:nvPr/>
+        </p:nvSpPr>
+        <p:spPr>
+          <a:xfrm>
+            <a:off x="4334256" y="1554480"/>
+            <a:ext cx="832104" cy="274320"/>
           </a:xfrm>
           <a:prstGeom prst="rect">
             <a:avLst/>
@@ -3647,14 +3837,14 @@
       </p:sp>
       <p:sp>
         <p:nvSpPr>
-          <p:cNvPr id="16" name="TextBox 15"/>
+          <p:cNvPr id="21" name="TextBox 20"/>
           <p:cNvSpPr txBox="1"/>
           <p:nvPr/>
         </p:nvSpPr>
         <p:spPr>
           <a:xfrm>
-            <a:off x="3666744" y="2642616"/>
-            <a:ext cx="2048256" cy="164592"/>
+            <a:off x="4352544" y="1609344"/>
+            <a:ext cx="832104" cy="164592"/>
           </a:xfrm>
           <a:prstGeom prst="rect">
             <a:avLst/>
@@ -3681,16 +3871,180 @@
           </a:p>
         </p:txBody>
       </p:sp>
+      <p:sp>
+        <p:nvSpPr>
+          <p:cNvPr id="22" name="Rectangle 21"/>
+          <p:cNvSpPr/>
+          <p:nvPr/>
+        </p:nvSpPr>
+        <p:spPr>
+          <a:xfrm>
+            <a:off x="1837944" y="2377440"/>
+            <a:ext cx="1664208" cy="274320"/>
+          </a:xfrm>
+          <a:prstGeom prst="rect">
+            <a:avLst/>
+          </a:prstGeom>
+          <a:solidFill>
+            <a:srgbClr val="4F738E"/>
+          </a:solidFill>
+          <a:ln w="6350">
+            <a:solidFill>
+              <a:srgbClr val="FFFFFF"/>
+            </a:solidFill>
+          </a:ln>
+          <a:effectLst/>
+        </p:spPr>
+        <p:style>
+          <a:lnRef idx="1">
+            <a:schemeClr val="accent1"/>
+          </a:lnRef>
+          <a:fillRef idx="3">
+            <a:schemeClr val="accent1"/>
+          </a:fillRef>
+          <a:effectRef idx="2">
+            <a:schemeClr val="accent1"/>
+          </a:effectRef>
+          <a:fontRef idx="minor">
+            <a:schemeClr val="lt1"/>
+          </a:fontRef>
+        </p:style>
+        <p:txBody>
+          <a:bodyPr rtlCol="0" anchor="ctr"/>
+          <a:lstStyle/>
+          <a:p>
+            <a:pPr algn="ctr"/>
+          </a:p>
+        </p:txBody>
+      </p:sp>
+      <p:sp>
+        <p:nvSpPr>
+          <p:cNvPr id="23" name="TextBox 22"/>
+          <p:cNvSpPr txBox="1"/>
+          <p:nvPr/>
+        </p:nvSpPr>
+        <p:spPr>
+          <a:xfrm>
+            <a:off x="1837944" y="2432304"/>
+            <a:ext cx="1664208" cy="164592"/>
+          </a:xfrm>
+          <a:prstGeom prst="rect">
+            <a:avLst/>
+          </a:prstGeom>
+          <a:noFill/>
+          <a:effectLst/>
+        </p:spPr>
+        <p:txBody>
+          <a:bodyPr wrap="square" lIns="0" rIns="0" tIns="0" bIns="0" anchor="ctr">
+            <a:spAutoFit/>
+          </a:bodyPr>
+          <a:lstStyle/>
+          <a:p>
+            <a:pPr algn="ctr"/>
+            <a:r>
+              <a:rPr sz="700" b="1" i="0">
+                <a:solidFill>
+                  <a:srgbClr val="FFFFFF"/>
+                </a:solidFill>
+                <a:latin typeface="Arial"/>
+              </a:rPr>
+              <a:t>LC-CRT · 50.4 Gy / 28 Fx · RT + concurrent capecitabine</a:t>
+            </a:r>
+          </a:p>
+        </p:txBody>
+      </p:sp>
+      <p:sp>
+        <p:nvSpPr>
+          <p:cNvPr id="24" name="Rectangle 23"/>
+          <p:cNvSpPr/>
+          <p:nvPr/>
+        </p:nvSpPr>
+        <p:spPr>
+          <a:xfrm>
+            <a:off x="3502152" y="2377440"/>
+            <a:ext cx="1664208" cy="274320"/>
+          </a:xfrm>
+          <a:prstGeom prst="rect">
+            <a:avLst/>
+          </a:prstGeom>
+          <a:solidFill>
+            <a:srgbClr val="444A58"/>
+          </a:solidFill>
+          <a:ln w="6350">
+            <a:solidFill>
+              <a:srgbClr val="FFFFFF"/>
+            </a:solidFill>
+          </a:ln>
+          <a:effectLst/>
+        </p:spPr>
+        <p:style>
+          <a:lnRef idx="1">
+            <a:schemeClr val="accent1"/>
+          </a:lnRef>
+          <a:fillRef idx="3">
+            <a:schemeClr val="accent1"/>
+          </a:fillRef>
+          <a:effectRef idx="2">
+            <a:schemeClr val="accent1"/>
+          </a:effectRef>
+          <a:fontRef idx="minor">
+            <a:schemeClr val="lt1"/>
+          </a:fontRef>
+        </p:style>
+        <p:txBody>
+          <a:bodyPr rtlCol="0" anchor="ctr"/>
+          <a:lstStyle/>
+          <a:p>
+            <a:pPr algn="ctr"/>
+          </a:p>
+        </p:txBody>
+      </p:sp>
+      <p:sp>
+        <p:nvSpPr>
+          <p:cNvPr id="25" name="TextBox 24"/>
+          <p:cNvSpPr txBox="1"/>
+          <p:nvPr/>
+        </p:nvSpPr>
+        <p:spPr>
+          <a:xfrm>
+            <a:off x="3502152" y="2432304"/>
+            <a:ext cx="1664208" cy="164592"/>
+          </a:xfrm>
+          <a:prstGeom prst="rect">
+            <a:avLst/>
+          </a:prstGeom>
+          <a:noFill/>
+          <a:effectLst/>
+        </p:spPr>
+        <p:txBody>
+          <a:bodyPr wrap="square" lIns="0" rIns="0" tIns="0" bIns="0" anchor="ctr">
+            <a:spAutoFit/>
+          </a:bodyPr>
+          <a:lstStyle/>
+          <a:p>
+            <a:pPr algn="ctr"/>
+            <a:r>
+              <a:rPr sz="700" b="1" i="0">
+                <a:solidFill>
+                  <a:srgbClr val="FFFFFF"/>
+                </a:solidFill>
+                <a:latin typeface="Arial"/>
+              </a:rPr>
+              <a:t>surgery</a:t>
+            </a:r>
+          </a:p>
+        </p:txBody>
+      </p:sp>
       <p:cxnSp>
         <p:nvCxnSpPr>
-          <p:cNvPr id="17" name="Connector 16"/>
+          <p:cNvPr id="26" name="Connector 25"/>
           <p:cNvCxnSpPr/>
           <p:nvPr/>
         </p:nvCxnSpPr>
         <p:spPr>
           <a:xfrm>
-            <a:off x="594360" y="1252728"/>
-            <a:ext cx="5120640" cy="0"/>
+            <a:off x="1005840" y="1060704"/>
+            <a:ext cx="4160520" cy="0"/>
           </a:xfrm>
           <a:prstGeom prst="line">
             <a:avLst/>
@@ -3720,14 +4074,14 @@
       </p:cxnSp>
       <p:cxnSp>
         <p:nvCxnSpPr>
-          <p:cNvPr id="18" name="Connector 17"/>
+          <p:cNvPr id="27" name="Connector 26"/>
           <p:cNvCxnSpPr/>
           <p:nvPr/>
         </p:nvCxnSpPr>
         <p:spPr>
           <a:xfrm>
-            <a:off x="594360" y="2990088"/>
-            <a:ext cx="5120640" cy="0"/>
+            <a:off x="1005840" y="1883664"/>
+            <a:ext cx="4160520" cy="0"/>
           </a:xfrm>
           <a:prstGeom prst="line">
             <a:avLst/>
@@ -3755,16 +4109,53 @@
           </a:fontRef>
         </p:style>
       </p:cxnSp>
-      <p:sp>
-        <p:nvSpPr>
-          <p:cNvPr id="19" name="Oval 18"/>
-          <p:cNvSpPr/>
-          <p:nvPr/>
-        </p:nvSpPr>
-        <p:spPr>
-          <a:xfrm>
-            <a:off x="1590488" y="721808"/>
-            <a:ext cx="56000" cy="56000"/>
+      <p:cxnSp>
+        <p:nvCxnSpPr>
+          <p:cNvPr id="28" name="Connector 27"/>
+          <p:cNvCxnSpPr/>
+          <p:nvPr/>
+        </p:nvCxnSpPr>
+        <p:spPr>
+          <a:xfrm>
+            <a:off x="1005840" y="2706624"/>
+            <a:ext cx="4160520" cy="0"/>
+          </a:xfrm>
+          <a:prstGeom prst="line">
+            <a:avLst/>
+          </a:prstGeom>
+          <a:ln w="7620">
+            <a:solidFill>
+              <a:srgbClr val="222222"/>
+            </a:solidFill>
+            <a:tailEnd type="triangle" w="med" len="med"/>
+          </a:ln>
+          <a:effectLst/>
+        </p:spPr>
+        <p:style>
+          <a:lnRef idx="2">
+            <a:schemeClr val="accent1"/>
+          </a:lnRef>
+          <a:fillRef idx="0">
+            <a:schemeClr val="accent1"/>
+          </a:fillRef>
+          <a:effectRef idx="1">
+            <a:schemeClr val="accent1"/>
+          </a:effectRef>
+          <a:fontRef idx="minor">
+            <a:schemeClr val="tx1"/>
+          </a:fontRef>
+        </p:style>
+      </p:cxnSp>
+      <p:sp>
+        <p:nvSpPr>
+          <p:cNvPr id="29" name="Oval 28"/>
+          <p:cNvSpPr/>
+          <p:nvPr/>
+        </p:nvSpPr>
+        <p:spPr>
+          <a:xfrm>
+            <a:off x="1813944" y="661800"/>
+            <a:ext cx="48000" cy="48000"/>
           </a:xfrm>
           <a:prstGeom prst="ellipse">
             <a:avLst/>
@@ -3803,14 +4194,14 @@
       </p:sp>
       <p:sp>
         <p:nvSpPr>
-          <p:cNvPr id="20" name="TextBox 19"/>
+          <p:cNvPr id="30" name="TextBox 29"/>
           <p:cNvSpPr txBox="1"/>
           <p:nvPr/>
         </p:nvSpPr>
         <p:spPr>
           <a:xfrm>
-            <a:off x="1115568" y="548640"/>
-            <a:ext cx="1005840" cy="201168"/>
+            <a:off x="1335024" y="512064"/>
+            <a:ext cx="1005840" cy="164592"/>
           </a:xfrm>
           <a:prstGeom prst="rect">
             <a:avLst/>
@@ -3826,7 +4217,7 @@
           <a:p>
             <a:pPr algn="ctr"/>
             <a:r>
-              <a:rPr sz="600" b="1" i="0">
+              <a:rPr sz="550" b="1" i="0">
                 <a:solidFill>
                   <a:srgbClr val="0A7D6E"/>
                 </a:solidFill>
@@ -3839,14 +4230,14 @@
       </p:sp>
       <p:sp>
         <p:nvSpPr>
-          <p:cNvPr id="21" name="Oval 20"/>
-          <p:cNvSpPr/>
-          <p:nvPr/>
-        </p:nvSpPr>
-        <p:spPr>
-          <a:xfrm>
-            <a:off x="3638744" y="721808"/>
-            <a:ext cx="56000" cy="56000"/>
+          <p:cNvPr id="31" name="Oval 30"/>
+          <p:cNvSpPr/>
+          <p:nvPr/>
+        </p:nvSpPr>
+        <p:spPr>
+          <a:xfrm>
+            <a:off x="3478152" y="661800"/>
+            <a:ext cx="48000" cy="48000"/>
           </a:xfrm>
           <a:prstGeom prst="ellipse">
             <a:avLst/>
@@ -3885,14 +4276,14 @@
       </p:sp>
       <p:sp>
         <p:nvSpPr>
-          <p:cNvPr id="22" name="TextBox 21"/>
+          <p:cNvPr id="32" name="TextBox 31"/>
           <p:cNvSpPr txBox="1"/>
           <p:nvPr/>
         </p:nvSpPr>
         <p:spPr>
           <a:xfrm>
-            <a:off x="3163824" y="548640"/>
-            <a:ext cx="1005840" cy="201168"/>
+            <a:off x="2999232" y="512064"/>
+            <a:ext cx="1005840" cy="164592"/>
           </a:xfrm>
           <a:prstGeom prst="rect">
             <a:avLst/>
@@ -3908,34 +4299,34 @@
           <a:p>
             <a:pPr algn="ctr"/>
             <a:r>
-              <a:rPr sz="600" b="1" i="0">
+              <a:rPr sz="550" b="1" i="0">
                 <a:solidFill>
                   <a:srgbClr val="0A7D6E"/>
                 </a:solidFill>
                 <a:latin typeface="Arial"/>
               </a:rPr>
               <a:t>post-biopsy
-(post-RT, pre-chemo)</a:t>
+(post-RT)</a:t>
             </a:r>
           </a:p>
         </p:txBody>
       </p:sp>
       <p:sp>
         <p:nvSpPr>
-          <p:cNvPr id="23" name="Oval 22"/>
-          <p:cNvSpPr/>
-          <p:nvPr/>
-        </p:nvSpPr>
-        <p:spPr>
-          <a:xfrm>
-            <a:off x="1590488" y="2459168"/>
-            <a:ext cx="56000" cy="56000"/>
+          <p:cNvPr id="33" name="Oval 32"/>
+          <p:cNvSpPr/>
+          <p:nvPr/>
+        </p:nvSpPr>
+        <p:spPr>
+          <a:xfrm>
+            <a:off x="1815944" y="1486760"/>
+            <a:ext cx="44000" cy="44000"/>
           </a:xfrm>
           <a:prstGeom prst="ellipse">
             <a:avLst/>
           </a:prstGeom>
           <a:solidFill>
-            <a:srgbClr val="8A2B4C"/>
+            <a:srgbClr val="D4A300"/>
           </a:solidFill>
           <a:ln w="11430">
             <a:solidFill>
@@ -3968,14 +4359,14 @@
       </p:sp>
       <p:sp>
         <p:nvSpPr>
-          <p:cNvPr id="24" name="TextBox 23"/>
+          <p:cNvPr id="34" name="TextBox 33"/>
           <p:cNvSpPr txBox="1"/>
           <p:nvPr/>
         </p:nvSpPr>
         <p:spPr>
           <a:xfrm>
-            <a:off x="1115568" y="2359152"/>
-            <a:ext cx="1005840" cy="128016"/>
+            <a:off x="1426464" y="1371600"/>
+            <a:ext cx="822960" cy="128016"/>
           </a:xfrm>
           <a:prstGeom prst="rect">
             <a:avLst/>
@@ -3991,7 +4382,171 @@
           <a:p>
             <a:pPr algn="ctr"/>
             <a:r>
-              <a:rPr sz="600" b="1" i="0">
+              <a:rPr sz="550" b="1" i="0">
+                <a:solidFill>
+                  <a:srgbClr val="D4A300"/>
+                </a:solidFill>
+                <a:latin typeface="Arial"/>
+              </a:rPr>
+              <a:t>pre (n=3)</a:t>
+            </a:r>
+          </a:p>
+        </p:txBody>
+      </p:sp>
+      <p:sp>
+        <p:nvSpPr>
+          <p:cNvPr id="35" name="Oval 34"/>
+          <p:cNvSpPr/>
+          <p:nvPr/>
+        </p:nvSpPr>
+        <p:spPr>
+          <a:xfrm>
+            <a:off x="4312256" y="1486760"/>
+            <a:ext cx="44000" cy="44000"/>
+          </a:xfrm>
+          <a:prstGeom prst="ellipse">
+            <a:avLst/>
+          </a:prstGeom>
+          <a:solidFill>
+            <a:srgbClr val="D4A300"/>
+          </a:solidFill>
+          <a:ln w="11430">
+            <a:solidFill>
+              <a:srgbClr val="FFFFFF"/>
+            </a:solidFill>
+          </a:ln>
+          <a:effectLst/>
+        </p:spPr>
+        <p:style>
+          <a:lnRef idx="1">
+            <a:schemeClr val="accent1"/>
+          </a:lnRef>
+          <a:fillRef idx="3">
+            <a:schemeClr val="accent1"/>
+          </a:fillRef>
+          <a:effectRef idx="2">
+            <a:schemeClr val="accent1"/>
+          </a:effectRef>
+          <a:fontRef idx="minor">
+            <a:schemeClr val="lt1"/>
+          </a:fontRef>
+        </p:style>
+        <p:txBody>
+          <a:bodyPr rtlCol="0" anchor="ctr"/>
+          <a:lstStyle/>
+          <a:p>
+            <a:pPr algn="ctr"/>
+          </a:p>
+        </p:txBody>
+      </p:sp>
+      <p:sp>
+        <p:nvSpPr>
+          <p:cNvPr id="36" name="TextBox 35"/>
+          <p:cNvSpPr txBox="1"/>
+          <p:nvPr/>
+        </p:nvSpPr>
+        <p:spPr>
+          <a:xfrm>
+            <a:off x="3831336" y="1371600"/>
+            <a:ext cx="1005840" cy="128016"/>
+          </a:xfrm>
+          <a:prstGeom prst="rect">
+            <a:avLst/>
+          </a:prstGeom>
+          <a:noFill/>
+          <a:effectLst/>
+        </p:spPr>
+        <p:txBody>
+          <a:bodyPr wrap="square" lIns="0" rIns="0" tIns="0" bIns="0" anchor="ctr">
+            <a:spAutoFit/>
+          </a:bodyPr>
+          <a:lstStyle/>
+          <a:p>
+            <a:pPr algn="ctr"/>
+            <a:r>
+              <a:rPr sz="550" b="1" i="0">
+                <a:solidFill>
+                  <a:srgbClr val="D4A300"/>
+                </a:solidFill>
+                <a:latin typeface="Arial"/>
+              </a:rPr>
+              <a:t>post-TNT (n=8)</a:t>
+            </a:r>
+          </a:p>
+        </p:txBody>
+      </p:sp>
+      <p:sp>
+        <p:nvSpPr>
+          <p:cNvPr id="37" name="Oval 36"/>
+          <p:cNvSpPr/>
+          <p:nvPr/>
+        </p:nvSpPr>
+        <p:spPr>
+          <a:xfrm>
+            <a:off x="1815944" y="2309720"/>
+            <a:ext cx="44000" cy="44000"/>
+          </a:xfrm>
+          <a:prstGeom prst="ellipse">
+            <a:avLst/>
+          </a:prstGeom>
+          <a:solidFill>
+            <a:srgbClr val="8A2B4C"/>
+          </a:solidFill>
+          <a:ln w="11430">
+            <a:solidFill>
+              <a:srgbClr val="FFFFFF"/>
+            </a:solidFill>
+          </a:ln>
+          <a:effectLst/>
+        </p:spPr>
+        <p:style>
+          <a:lnRef idx="1">
+            <a:schemeClr val="accent1"/>
+          </a:lnRef>
+          <a:fillRef idx="3">
+            <a:schemeClr val="accent1"/>
+          </a:fillRef>
+          <a:effectRef idx="2">
+            <a:schemeClr val="accent1"/>
+          </a:effectRef>
+          <a:fontRef idx="minor">
+            <a:schemeClr val="lt1"/>
+          </a:fontRef>
+        </p:style>
+        <p:txBody>
+          <a:bodyPr rtlCol="0" anchor="ctr"/>
+          <a:lstStyle/>
+          <a:p>
+            <a:pPr algn="ctr"/>
+          </a:p>
+        </p:txBody>
+      </p:sp>
+      <p:sp>
+        <p:nvSpPr>
+          <p:cNvPr id="38" name="TextBox 37"/>
+          <p:cNvSpPr txBox="1"/>
+          <p:nvPr/>
+        </p:nvSpPr>
+        <p:spPr>
+          <a:xfrm>
+            <a:off x="1426464" y="2194560"/>
+            <a:ext cx="822960" cy="128016"/>
+          </a:xfrm>
+          <a:prstGeom prst="rect">
+            <a:avLst/>
+          </a:prstGeom>
+          <a:noFill/>
+          <a:effectLst/>
+        </p:spPr>
+        <p:txBody>
+          <a:bodyPr wrap="square" lIns="0" rIns="0" tIns="0" bIns="0" anchor="ctr">
+            <a:spAutoFit/>
+          </a:bodyPr>
+          <a:lstStyle/>
+          <a:p>
+            <a:pPr algn="ctr"/>
+            <a:r>
+              <a:rPr sz="550" b="1" i="0">
                 <a:solidFill>
                   <a:srgbClr val="8A2B4C"/>
                 </a:solidFill>
@@ -4004,14 +4559,14 @@
       </p:sp>
       <p:cxnSp>
         <p:nvCxnSpPr>
-          <p:cNvPr id="25" name="Connector 24"/>
+          <p:cNvPr id="39" name="Connector 38"/>
           <p:cNvCxnSpPr/>
           <p:nvPr/>
         </p:nvCxnSpPr>
         <p:spPr>
           <a:xfrm>
-            <a:off x="1572768" y="365760"/>
-            <a:ext cx="0" cy="91440"/>
+            <a:off x="1792224" y="347472"/>
+            <a:ext cx="0" cy="73152"/>
           </a:xfrm>
           <a:prstGeom prst="line">
             <a:avLst/>
@@ -4040,14 +4595,14 @@
       </p:cxnSp>
       <p:cxnSp>
         <p:nvCxnSpPr>
-          <p:cNvPr id="26" name="Connector 25"/>
+          <p:cNvPr id="40" name="Connector 39"/>
           <p:cNvCxnSpPr/>
           <p:nvPr/>
         </p:nvCxnSpPr>
         <p:spPr>
           <a:xfrm>
-            <a:off x="1572768" y="365760"/>
-            <a:ext cx="2139696" cy="0"/>
+            <a:off x="1792224" y="347472"/>
+            <a:ext cx="1755648" cy="0"/>
           </a:xfrm>
           <a:prstGeom prst="line">
             <a:avLst/>
@@ -4076,14 +4631,14 @@
       </p:cxnSp>
       <p:cxnSp>
         <p:nvCxnSpPr>
-          <p:cNvPr id="27" name="Connector 26"/>
+          <p:cNvPr id="41" name="Connector 40"/>
           <p:cNvCxnSpPr/>
           <p:nvPr/>
         </p:nvCxnSpPr>
         <p:spPr>
           <a:xfrm>
-            <a:off x="3712464" y="365760"/>
-            <a:ext cx="0" cy="91440"/>
+            <a:off x="3547872" y="347472"/>
+            <a:ext cx="0" cy="73152"/>
           </a:xfrm>
           <a:prstGeom prst="line">
             <a:avLst/>
@@ -4112,14 +4667,14 @@
       </p:cxnSp>
       <p:sp>
         <p:nvSpPr>
-          <p:cNvPr id="28" name="TextBox 27"/>
+          <p:cNvPr id="42" name="TextBox 41"/>
           <p:cNvSpPr txBox="1"/>
           <p:nvPr/>
         </p:nvSpPr>
         <p:spPr>
           <a:xfrm>
-            <a:off x="1618488" y="210312"/>
-            <a:ext cx="2048256" cy="146304"/>
+            <a:off x="1837944" y="219456"/>
+            <a:ext cx="1664208" cy="128016"/>
           </a:xfrm>
           <a:prstGeom prst="rect">
             <a:avLst/>
@@ -4135,26 +4690,26 @@
           <a:p>
             <a:pPr algn="ctr"/>
             <a:r>
-              <a:rPr sz="600" b="1" i="1">
+              <a:rPr sz="550" b="1" i="1">
                 <a:solidFill>
                   <a:srgbClr val="222222"/>
                 </a:solidFill>
                 <a:latin typeface="Arial"/>
               </a:rPr>
-              <a:t>Sampling window brackets radiation phase only</a:t>
+              <a:t>Discovery sampling window brackets radiation phase only</a:t>
             </a:r>
           </a:p>
         </p:txBody>
       </p:sp>
       <p:sp>
         <p:nvSpPr>
-          <p:cNvPr id="29" name="Rectangle 28"/>
-          <p:cNvSpPr/>
-          <p:nvPr/>
-        </p:nvSpPr>
-        <p:spPr>
-          <a:xfrm>
-            <a:off x="5166360" y="1746504"/>
+          <p:cNvPr id="43" name="Rectangle 42"/>
+          <p:cNvSpPr/>
+          <p:nvPr/>
+        </p:nvSpPr>
+        <p:spPr>
+          <a:xfrm>
+            <a:off x="4617720" y="1536192"/>
             <a:ext cx="1188720" cy="411480"/>
           </a:xfrm>
           <a:prstGeom prst="rect">
@@ -4194,13 +4749,13 @@
       </p:sp>
       <p:sp>
         <p:nvSpPr>
-          <p:cNvPr id="30" name="TextBox 29"/>
+          <p:cNvPr id="44" name="TextBox 43"/>
           <p:cNvSpPr txBox="1"/>
           <p:nvPr/>
         </p:nvSpPr>
         <p:spPr>
           <a:xfrm>
-            <a:off x="5166360" y="1746504"/>
+            <a:off x="4617720" y="1536192"/>
             <a:ext cx="1188720" cy="201168"/>
           </a:xfrm>
           <a:prstGeom prst="rect">
@@ -4223,20 +4778,20 @@
                 </a:solidFill>
                 <a:latin typeface="Arial"/>
               </a:rPr>
-              <a:t>Final full-TNT response</a:t>
+              <a:t>Final TNT response</a:t>
             </a:r>
           </a:p>
         </p:txBody>
       </p:sp>
       <p:sp>
         <p:nvSpPr>
-          <p:cNvPr id="31" name="TextBox 30"/>
+          <p:cNvPr id="45" name="TextBox 44"/>
           <p:cNvSpPr txBox="1"/>
           <p:nvPr/>
         </p:nvSpPr>
         <p:spPr>
           <a:xfrm>
-            <a:off x="5166360" y="1920240"/>
+            <a:off x="4617720" y="1709928"/>
             <a:ext cx="1188720" cy="201168"/>
           </a:xfrm>
           <a:prstGeom prst="rect">
@@ -4266,19 +4821,19 @@
       </p:sp>
       <p:cxnSp>
         <p:nvCxnSpPr>
-          <p:cNvPr id="32" name="Connector 31"/>
+          <p:cNvPr id="46" name="Connector 45"/>
           <p:cNvCxnSpPr/>
           <p:nvPr/>
         </p:nvCxnSpPr>
         <p:spPr>
           <a:xfrm flipH="1">
-            <a:off x="5221224" y="987552"/>
-            <a:ext cx="493776" cy="960120"/>
+            <a:off x="4672584" y="868680"/>
+            <a:ext cx="493776" cy="868680"/>
           </a:xfrm>
           <a:prstGeom prst="line">
             <a:avLst/>
           </a:prstGeom>
-          <a:ln w="7620">
+          <a:ln w="6350">
             <a:solidFill>
               <a:srgbClr val="222222"/>
             </a:solidFill>
@@ -4303,19 +4858,56 @@
       </p:cxnSp>
       <p:cxnSp>
         <p:nvCxnSpPr>
-          <p:cNvPr id="33" name="Connector 32"/>
+          <p:cNvPr id="47" name="Connector 46"/>
           <p:cNvCxnSpPr/>
           <p:nvPr/>
         </p:nvCxnSpPr>
         <p:spPr>
+          <a:xfrm flipH="1">
+            <a:off x="4672584" y="1691640"/>
+            <a:ext cx="493776" cy="45720"/>
+          </a:xfrm>
+          <a:prstGeom prst="line">
+            <a:avLst/>
+          </a:prstGeom>
+          <a:ln w="6350">
+            <a:solidFill>
+              <a:srgbClr val="222222"/>
+            </a:solidFill>
+            <a:tailEnd type="triangle" w="med" len="med"/>
+          </a:ln>
+          <a:effectLst/>
+        </p:spPr>
+        <p:style>
+          <a:lnRef idx="2">
+            <a:schemeClr val="accent1"/>
+          </a:lnRef>
+          <a:fillRef idx="0">
+            <a:schemeClr val="accent1"/>
+          </a:fillRef>
+          <a:effectRef idx="1">
+            <a:schemeClr val="accent1"/>
+          </a:effectRef>
+          <a:fontRef idx="minor">
+            <a:schemeClr val="tx1"/>
+          </a:fontRef>
+        </p:style>
+      </p:cxnSp>
+      <p:cxnSp>
+        <p:nvCxnSpPr>
+          <p:cNvPr id="48" name="Connector 47"/>
+          <p:cNvCxnSpPr/>
+          <p:nvPr/>
+        </p:nvCxnSpPr>
+        <p:spPr>
           <a:xfrm flipH="1" flipV="1">
-            <a:off x="5221224" y="1947672"/>
+            <a:off x="4672584" y="1737360"/>
             <a:ext cx="493776" cy="777240"/>
           </a:xfrm>
           <a:prstGeom prst="line">
             <a:avLst/>
           </a:prstGeom>
-          <a:ln w="7620">
+          <a:ln w="6350">
             <a:solidFill>
               <a:srgbClr val="222222"/>
             </a:solidFill>
@@ -4340,167 +4932,13 @@
       </p:cxnSp>
       <p:sp>
         <p:nvSpPr>
-          <p:cNvPr id="34" name="Rectangle 33"/>
-          <p:cNvSpPr/>
-          <p:nvPr/>
-        </p:nvSpPr>
-        <p:spPr>
-          <a:xfrm>
-            <a:off x="1143000" y="1828800"/>
-            <a:ext cx="3657600" cy="502920"/>
-          </a:xfrm>
-          <a:prstGeom prst="rect">
-            <a:avLst/>
-          </a:prstGeom>
-          <a:solidFill>
-            <a:srgbClr val="FAF2D8"/>
-          </a:solidFill>
-          <a:ln w="8890">
-            <a:solidFill>
-              <a:srgbClr val="D4A300"/>
-            </a:solidFill>
-          </a:ln>
-          <a:effectLst/>
-        </p:spPr>
-        <p:style>
-          <a:lnRef idx="1">
-            <a:schemeClr val="accent1"/>
-          </a:lnRef>
-          <a:fillRef idx="3">
-            <a:schemeClr val="accent1"/>
-          </a:fillRef>
-          <a:effectRef idx="2">
-            <a:schemeClr val="accent1"/>
-          </a:effectRef>
-          <a:fontRef idx="minor">
-            <a:schemeClr val="lt1"/>
-          </a:fontRef>
-        </p:style>
-        <p:txBody>
-          <a:bodyPr rtlCol="0" anchor="ctr"/>
-          <a:lstStyle/>
-          <a:p>
-            <a:pPr algn="ctr"/>
-          </a:p>
-        </p:txBody>
-      </p:sp>
-      <p:sp>
-        <p:nvSpPr>
-          <p:cNvPr id="35" name="TextBox 34"/>
+          <p:cNvPr id="49" name="TextBox 48"/>
           <p:cNvSpPr txBox="1"/>
           <p:nvPr/>
         </p:nvSpPr>
         <p:spPr>
           <a:xfrm>
-            <a:off x="1188720" y="1856232"/>
-            <a:ext cx="3566160" cy="173736"/>
-          </a:xfrm>
-          <a:prstGeom prst="rect">
-            <a:avLst/>
-          </a:prstGeom>
-          <a:noFill/>
-          <a:effectLst/>
-        </p:spPr>
-        <p:txBody>
-          <a:bodyPr wrap="square" lIns="0" rIns="0" tIns="0" bIns="0" anchor="ctr">
-            <a:spAutoFit/>
-          </a:bodyPr>
-          <a:lstStyle/>
-          <a:p>
-            <a:pPr algn="ctr"/>
-            <a:r>
-              <a:rPr sz="600" b="1" i="0">
-                <a:solidFill>
-                  <a:srgbClr val="D4A300"/>
-                </a:solidFill>
-                <a:latin typeface="Arial"/>
-              </a:rPr>
-              <a:t>Chemo-timing contrast</a:t>
-            </a:r>
-          </a:p>
-        </p:txBody>
-      </p:sp>
-      <p:sp>
-        <p:nvSpPr>
-          <p:cNvPr id="36" name="TextBox 35"/>
-          <p:cNvSpPr txBox="1"/>
-          <p:nvPr/>
-        </p:nvSpPr>
-        <p:spPr>
-          <a:xfrm>
-            <a:off x="1188720" y="2011680"/>
-            <a:ext cx="3566160" cy="164592"/>
-          </a:xfrm>
-          <a:prstGeom prst="rect">
-            <a:avLst/>
-          </a:prstGeom>
-          <a:noFill/>
-          <a:effectLst/>
-        </p:spPr>
-        <p:txBody>
-          <a:bodyPr wrap="square" lIns="0" rIns="0" tIns="0" bIns="0" anchor="ctr">
-            <a:spAutoFit/>
-          </a:bodyPr>
-          <a:lstStyle/>
-          <a:p>
-            <a:pPr algn="ctr"/>
-            <a:r>
-              <a:rPr sz="700" b="1" i="0">
-                <a:solidFill>
-                  <a:srgbClr val="0A7D6E"/>
-                </a:solidFill>
-                <a:latin typeface="Arial"/>
-              </a:rPr>
-              <a:t>Discovery: chemo AFTER RT (consolidated)</a:t>
-            </a:r>
-          </a:p>
-        </p:txBody>
-      </p:sp>
-      <p:sp>
-        <p:nvSpPr>
-          <p:cNvPr id="37" name="TextBox 36"/>
-          <p:cNvSpPr txBox="1"/>
-          <p:nvPr/>
-        </p:nvSpPr>
-        <p:spPr>
-          <a:xfrm>
-            <a:off x="1188720" y="2157984"/>
-            <a:ext cx="3566160" cy="164592"/>
-          </a:xfrm>
-          <a:prstGeom prst="rect">
-            <a:avLst/>
-          </a:prstGeom>
-          <a:noFill/>
-          <a:effectLst/>
-        </p:spPr>
-        <p:txBody>
-          <a:bodyPr wrap="square" lIns="0" rIns="0" tIns="0" bIns="0" anchor="ctr">
-            <a:spAutoFit/>
-          </a:bodyPr>
-          <a:lstStyle/>
-          <a:p>
-            <a:pPr algn="ctr"/>
-            <a:r>
-              <a:rPr sz="700" b="1" i="0">
-                <a:solidFill>
-                  <a:srgbClr val="8A2B4C"/>
-                </a:solidFill>
-                <a:latin typeface="Arial"/>
-              </a:rPr>
-              <a:t>External: chemo DURING RT (concurrent)</a:t>
-            </a:r>
-          </a:p>
-        </p:txBody>
-      </p:sp>
-      <p:sp>
-        <p:nvSpPr>
-          <p:cNvPr id="38" name="TextBox 37"/>
-          <p:cNvSpPr txBox="1"/>
-          <p:nvPr/>
-        </p:nvSpPr>
-        <p:spPr>
-          <a:xfrm>
-            <a:off x="137160" y="3474720"/>
+            <a:off x="137160" y="3035808"/>
             <a:ext cx="5669280" cy="146304"/>
           </a:xfrm>
           <a:prstGeom prst="rect">
@@ -4523,20 +4961,20 @@
                 </a:solidFill>
                 <a:latin typeface="Arial"/>
               </a:rPr>
-              <a:t>Both regimens end at the same clinical response endpoint. Baseline (pre) biopsies precede all therapy; the TNT post-biopsy samples RT alone (chemo follows). The pre-only baseline predictor</a:t>
+              <a:t>All three regimens converge to the same final-response endpoint. The pre-treatment baseline predictor (Fig 9) cannot encode</a:t>
             </a:r>
           </a:p>
         </p:txBody>
       </p:sp>
       <p:sp>
         <p:nvSpPr>
-          <p:cNvPr id="39" name="TextBox 38"/>
+          <p:cNvPr id="50" name="TextBox 49"/>
           <p:cNvSpPr txBox="1"/>
           <p:nvPr/>
         </p:nvSpPr>
         <p:spPr>
           <a:xfrm>
-            <a:off x="137160" y="3630168"/>
+            <a:off x="137160" y="3191256"/>
             <a:ext cx="5669280" cy="146304"/>
           </a:xfrm>
           <a:prstGeom prst="rect">
@@ -4559,20 +4997,56 @@
                 </a:solidFill>
                 <a:latin typeface="Arial"/>
               </a:rPr>
-              <a:t>(tested in Fig 9) therefore cannot encode the chemo-timing difference → regimen-agnostic.  Paired analyses (Figs 6-8) are scoped to the RT-phase window only.</a:t>
+              <a:t>downstream regimen choice and nevertheless reproduces across RT fractionation (SC-RT vs LC-CRT) and chemo-timing/backbone axes → regimen-agnostic.</a:t>
             </a:r>
           </a:p>
         </p:txBody>
       </p:sp>
       <p:sp>
         <p:nvSpPr>
-          <p:cNvPr id="40" name="TextBox 39"/>
+          <p:cNvPr id="51" name="TextBox 50"/>
           <p:cNvSpPr txBox="1"/>
           <p:nvPr/>
         </p:nvSpPr>
         <p:spPr>
           <a:xfrm>
-            <a:off x="365760" y="3090672"/>
+            <a:off x="137160" y="3346704"/>
+            <a:ext cx="5669280" cy="146304"/>
+          </a:xfrm>
+          <a:prstGeom prst="rect">
+            <a:avLst/>
+          </a:prstGeom>
+          <a:noFill/>
+          <a:effectLst/>
+        </p:spPr>
+        <p:txBody>
+          <a:bodyPr wrap="square" lIns="0" rIns="0" tIns="0" bIns="0" anchor="ctr">
+            <a:spAutoFit/>
+          </a:bodyPr>
+          <a:lstStyle/>
+          <a:p>
+            <a:pPr algn="ctr"/>
+            <a:r>
+              <a:rPr sz="600" b="0" i="1">
+                <a:solidFill>
+                  <a:srgbClr val="555555"/>
+                </a:solidFill>
+                <a:latin typeface="Arial"/>
+              </a:rPr>
+              <a:t>Paired analyses (Figs 6–8) are scoped to the discovery RT-phase window only.</a:t>
+            </a:r>
+          </a:p>
+        </p:txBody>
+      </p:sp>
+      <p:sp>
+        <p:nvSpPr>
+          <p:cNvPr id="52" name="TextBox 51"/>
+          <p:cNvSpPr txBox="1"/>
+          <p:nvPr/>
+        </p:nvSpPr>
+        <p:spPr>
+          <a:xfrm>
+            <a:off x="777240" y="2770632"/>
             <a:ext cx="457200" cy="109728"/>
           </a:xfrm>
           <a:prstGeom prst="rect">
@@ -4602,13 +5076,13 @@
       </p:sp>
       <p:sp>
         <p:nvSpPr>
-          <p:cNvPr id="41" name="TextBox 40"/>
+          <p:cNvPr id="53" name="TextBox 52"/>
           <p:cNvSpPr txBox="1"/>
           <p:nvPr/>
         </p:nvSpPr>
         <p:spPr>
           <a:xfrm>
-            <a:off x="5486400" y="3090672"/>
+            <a:off x="4937760" y="2770632"/>
             <a:ext cx="457200" cy="109728"/>
           </a:xfrm>
           <a:prstGeom prst="rect">
@@ -20716,8 +21190,8 @@
         </p:nvSpPr>
         <p:spPr>
           <a:xfrm>
-            <a:off x="182880" y="576072"/>
-            <a:ext cx="640080" cy="128016"/>
+            <a:off x="182880" y="484632"/>
+            <a:ext cx="914400" cy="128016"/>
           </a:xfrm>
           <a:prstGeom prst="rect">
             <a:avLst/>
@@ -20752,7 +21226,7 @@
         </p:nvSpPr>
         <p:spPr>
           <a:xfrm>
-            <a:off x="182880" y="704088"/>
+            <a:off x="182880" y="612648"/>
             <a:ext cx="868680" cy="182880"/>
           </a:xfrm>
           <a:prstGeom prst="rect">
@@ -20788,7 +21262,7 @@
         </p:nvSpPr>
         <p:spPr>
           <a:xfrm>
-            <a:off x="182880" y="896112"/>
+            <a:off x="182880" y="804672"/>
             <a:ext cx="868680" cy="292608"/>
           </a:xfrm>
           <a:prstGeom prst="rect">
@@ -20824,7 +21298,7 @@
         </p:nvSpPr>
         <p:spPr>
           <a:xfrm>
-            <a:off x="1097280" y="797814"/>
+            <a:off x="1097280" y="649224"/>
             <a:ext cx="3017520" cy="164592"/>
           </a:xfrm>
           <a:prstGeom prst="rect">
@@ -20868,7 +21342,7 @@
         </p:nvSpPr>
         <p:spPr>
           <a:xfrm>
-            <a:off x="1097280" y="797814"/>
+            <a:off x="1097280" y="649224"/>
             <a:ext cx="1478585" cy="164592"/>
           </a:xfrm>
           <a:prstGeom prst="rect">
@@ -20914,7 +21388,7 @@
         </p:nvSpPr>
         <p:spPr>
           <a:xfrm>
-            <a:off x="1097280" y="980694"/>
+            <a:off x="1097280" y="832104"/>
             <a:ext cx="3017520" cy="118872"/>
           </a:xfrm>
           <a:prstGeom prst="rect">
@@ -20950,7 +21424,7 @@
         </p:nvSpPr>
         <p:spPr>
           <a:xfrm>
-            <a:off x="4251960" y="576072"/>
+            <a:off x="4251960" y="484632"/>
             <a:ext cx="1188720" cy="201168"/>
           </a:xfrm>
           <a:prstGeom prst="rect">
@@ -20986,7 +21460,7 @@
         </p:nvSpPr>
         <p:spPr>
           <a:xfrm>
-            <a:off x="4251960" y="822960"/>
+            <a:off x="4251960" y="731520"/>
             <a:ext cx="1280160" cy="146304"/>
           </a:xfrm>
           <a:prstGeom prst="rect">
@@ -21022,7 +21496,7 @@
         </p:nvSpPr>
         <p:spPr>
           <a:xfrm>
-            <a:off x="4251960" y="1005840"/>
+            <a:off x="4251960" y="914400"/>
             <a:ext cx="1280160" cy="146304"/>
           </a:xfrm>
           <a:prstGeom prst="rect">
@@ -21058,7 +21532,7 @@
         </p:nvCxnSpPr>
         <p:spPr>
           <a:xfrm>
-            <a:off x="182880" y="1257300"/>
+            <a:off x="182880" y="1051560"/>
             <a:ext cx="5577840" cy="0"/>
           </a:xfrm>
           <a:prstGeom prst="line">
@@ -21094,8 +21568,8 @@
         </p:nvSpPr>
         <p:spPr>
           <a:xfrm>
-            <a:off x="182880" y="1330452"/>
-            <a:ext cx="640080" cy="128016"/>
+            <a:off x="182880" y="1124712"/>
+            <a:ext cx="914400" cy="128016"/>
           </a:xfrm>
           <a:prstGeom prst="rect">
             <a:avLst/>
@@ -21117,7 +21591,7 @@
                 </a:solidFill>
                 <a:latin typeface="Arial"/>
               </a:rPr>
-              <a:t>EXTERNAL</a:t>
+              <a:t>LC-CRT META</a:t>
             </a:r>
           </a:p>
         </p:txBody>
@@ -21130,7 +21604,7 @@
         </p:nvSpPr>
         <p:spPr>
           <a:xfrm>
-            <a:off x="182880" y="1458468"/>
+            <a:off x="182880" y="1252728"/>
             <a:ext cx="868680" cy="182880"/>
           </a:xfrm>
           <a:prstGeom prst="rect">
@@ -21153,7 +21627,7 @@
                 </a:solidFill>
                 <a:latin typeface="Arial"/>
               </a:rPr>
-              <a:t>Thread 1 meta (5 cohorts, N = 518)</a:t>
+              <a:t>Thread 1 (5 cohorts, N = 518)</a:t>
             </a:r>
           </a:p>
         </p:txBody>
@@ -21166,7 +21640,7 @@
         </p:nvSpPr>
         <p:spPr>
           <a:xfrm>
-            <a:off x="182880" y="1650492"/>
+            <a:off x="182880" y="1444752"/>
             <a:ext cx="868680" cy="292608"/>
           </a:xfrm>
           <a:prstGeom prst="rect">
@@ -21189,7 +21663,7 @@
                 </a:solidFill>
                 <a:latin typeface="Arial"/>
               </a:rPr>
-              <a:t>DSB Z = +3.17 · cell-cycle +3.21 · E2F/MYC +2.79 · EMT +1.61 (trend)</a:t>
+              <a:t>DSB Z=+3.17 · cell-cycle +3.21 · E2F/MYC +2.79 · EMT +1.61 (trend)</a:t>
             </a:r>
           </a:p>
         </p:txBody>
@@ -21202,7 +21676,7 @@
         </p:nvSpPr>
         <p:spPr>
           <a:xfrm>
-            <a:off x="1097280" y="1552194"/>
+            <a:off x="1097280" y="1289304"/>
             <a:ext cx="3017520" cy="164592"/>
           </a:xfrm>
           <a:prstGeom prst="rect">
@@ -21246,7 +21720,7 @@
         </p:nvSpPr>
         <p:spPr>
           <a:xfrm>
-            <a:off x="1097280" y="1552194"/>
+            <a:off x="1097280" y="1289304"/>
             <a:ext cx="2421560" cy="164592"/>
           </a:xfrm>
           <a:prstGeom prst="rect">
@@ -21292,7 +21766,7 @@
         </p:nvSpPr>
         <p:spPr>
           <a:xfrm>
-            <a:off x="1097280" y="1735074"/>
+            <a:off x="1097280" y="1472184"/>
             <a:ext cx="3017520" cy="118872"/>
           </a:xfrm>
           <a:prstGeom prst="rect">
@@ -21328,7 +21802,7 @@
         </p:nvSpPr>
         <p:spPr>
           <a:xfrm>
-            <a:off x="4251960" y="1330452"/>
+            <a:off x="4251960" y="1124712"/>
             <a:ext cx="1188720" cy="201168"/>
           </a:xfrm>
           <a:prstGeom prst="rect">
@@ -21364,7 +21838,7 @@
         </p:nvSpPr>
         <p:spPr>
           <a:xfrm>
-            <a:off x="4251960" y="1577340"/>
+            <a:off x="4251960" y="1371600"/>
             <a:ext cx="1280160" cy="146304"/>
           </a:xfrm>
           <a:prstGeom prst="rect">
@@ -21400,7 +21874,7 @@
         </p:nvSpPr>
         <p:spPr>
           <a:xfrm>
-            <a:off x="4251960" y="1760220"/>
+            <a:off x="4251960" y="1554480"/>
             <a:ext cx="1280160" cy="146304"/>
           </a:xfrm>
           <a:prstGeom prst="rect">
@@ -21423,7 +21897,7 @@
                 </a:solidFill>
                 <a:latin typeface="Arial"/>
               </a:rPr>
-              <a:t>→ Fig 9</a:t>
+              <a:t>→ Fig 9A</a:t>
             </a:r>
           </a:p>
         </p:txBody>
@@ -21436,7 +21910,7 @@
         </p:nvCxnSpPr>
         <p:spPr>
           <a:xfrm>
-            <a:off x="182880" y="2011680"/>
+            <a:off x="182880" y="1691640"/>
             <a:ext cx="5577840" cy="0"/>
           </a:xfrm>
           <a:prstGeom prst="line">
@@ -21472,8 +21946,8 @@
         </p:nvSpPr>
         <p:spPr>
           <a:xfrm>
-            <a:off x="182880" y="2084832"/>
-            <a:ext cx="640080" cy="128016"/>
+            <a:off x="182880" y="1764792"/>
+            <a:ext cx="914400" cy="128016"/>
           </a:xfrm>
           <a:prstGeom prst="rect">
             <a:avLst/>
@@ -21495,7 +21969,7 @@
                 </a:solidFill>
                 <a:latin typeface="Arial"/>
               </a:rPr>
-              <a:t>EXTERNAL</a:t>
+              <a:t>LC-CRT META</a:t>
             </a:r>
           </a:p>
         </p:txBody>
@@ -21508,7 +21982,7 @@
         </p:nvSpPr>
         <p:spPr>
           <a:xfrm>
-            <a:off x="182880" y="2212848"/>
+            <a:off x="182880" y="1892808"/>
             <a:ext cx="868680" cy="182880"/>
           </a:xfrm>
           <a:prstGeom prst="rect">
@@ -21531,7 +22005,7 @@
                 </a:solidFill>
                 <a:latin typeface="Arial"/>
               </a:rPr>
-              <a:t>Thread 2 meta (6 sources, N = 816)</a:t>
+              <a:t>Thread 2 (6 sources, N = 816)</a:t>
             </a:r>
           </a:p>
         </p:txBody>
@@ -21544,7 +22018,7 @@
         </p:nvSpPr>
         <p:spPr>
           <a:xfrm>
-            <a:off x="182880" y="2404872"/>
+            <a:off x="182880" y="2084832"/>
             <a:ext cx="868680" cy="292608"/>
           </a:xfrm>
           <a:prstGeom prst="rect">
@@ -21580,7 +22054,7 @@
         </p:nvSpPr>
         <p:spPr>
           <a:xfrm>
-            <a:off x="1097280" y="2306574"/>
+            <a:off x="1097280" y="1929384"/>
             <a:ext cx="3017520" cy="164592"/>
           </a:xfrm>
           <a:prstGeom prst="rect">
@@ -21624,7 +22098,7 @@
         </p:nvSpPr>
         <p:spPr>
           <a:xfrm>
-            <a:off x="1097280" y="2306574"/>
+            <a:off x="1097280" y="1929384"/>
             <a:ext cx="2481910" cy="164592"/>
           </a:xfrm>
           <a:prstGeom prst="rect">
@@ -21670,7 +22144,7 @@
         </p:nvSpPr>
         <p:spPr>
           <a:xfrm>
-            <a:off x="1097280" y="2489454"/>
+            <a:off x="1097280" y="2112264"/>
             <a:ext cx="3017520" cy="118872"/>
           </a:xfrm>
           <a:prstGeom prst="rect">
@@ -21706,7 +22180,7 @@
         </p:nvSpPr>
         <p:spPr>
           <a:xfrm>
-            <a:off x="4251960" y="2084832"/>
+            <a:off x="4251960" y="1764792"/>
             <a:ext cx="1188720" cy="201168"/>
           </a:xfrm>
           <a:prstGeom prst="rect">
@@ -21742,7 +22216,7 @@
         </p:nvSpPr>
         <p:spPr>
           <a:xfrm>
-            <a:off x="4251960" y="2331720"/>
+            <a:off x="4251960" y="2011680"/>
             <a:ext cx="1280160" cy="146304"/>
           </a:xfrm>
           <a:prstGeom prst="rect">
@@ -21778,7 +22252,7 @@
         </p:nvSpPr>
         <p:spPr>
           <a:xfrm>
-            <a:off x="4251960" y="2514600"/>
+            <a:off x="4251960" y="2194560"/>
             <a:ext cx="1280160" cy="146304"/>
           </a:xfrm>
           <a:prstGeom prst="rect">
@@ -21801,7 +22275,7 @@
                 </a:solidFill>
                 <a:latin typeface="Arial"/>
               </a:rPr>
-              <a:t>→ Fig 9</a:t>
+              <a:t>→ Fig 9A</a:t>
             </a:r>
           </a:p>
         </p:txBody>
@@ -21814,7 +22288,7 @@
         </p:nvCxnSpPr>
         <p:spPr>
           <a:xfrm>
-            <a:off x="182880" y="2766060"/>
+            <a:off x="182880" y="2331720"/>
             <a:ext cx="5577840" cy="0"/>
           </a:xfrm>
           <a:prstGeom prst="line">
@@ -21850,8 +22324,8 @@
         </p:nvSpPr>
         <p:spPr>
           <a:xfrm>
-            <a:off x="182880" y="2839212"/>
-            <a:ext cx="640080" cy="128016"/>
+            <a:off x="182880" y="2404872"/>
+            <a:ext cx="914400" cy="128016"/>
           </a:xfrm>
           <a:prstGeom prst="rect">
             <a:avLst/>
@@ -21873,6 +22347,384 @@
                 </a:solidFill>
                 <a:latin typeface="Arial"/>
               </a:rPr>
+              <a:t>SC-RT EXTERNAL</a:t>
+            </a:r>
+          </a:p>
+        </p:txBody>
+      </p:sp>
+      <p:sp>
+        <p:nvSpPr>
+          <p:cNvPr id="34" name="TextBox 33"/>
+          <p:cNvSpPr txBox="1"/>
+          <p:nvPr/>
+        </p:nvSpPr>
+        <p:spPr>
+          <a:xfrm>
+            <a:off x="182880" y="2532888"/>
+            <a:ext cx="868680" cy="182880"/>
+          </a:xfrm>
+          <a:prstGeom prst="rect">
+            <a:avLst/>
+          </a:prstGeom>
+          <a:noFill/>
+          <a:effectLst/>
+        </p:spPr>
+        <p:txBody>
+          <a:bodyPr wrap="square" lIns="0" rIns="0" tIns="0" bIns="0" anchor="ctr">
+            <a:spAutoFit/>
+          </a:bodyPr>
+          <a:lstStyle/>
+          <a:p>
+            <a:pPr algn="l"/>
+            <a:r>
+              <a:rPr sz="800" b="1" i="0">
+                <a:solidFill>
+                  <a:srgbClr val="222222"/>
+                </a:solidFill>
+                <a:latin typeface="Arial"/>
+              </a:rPr>
+              <a:t>GSE254249 (post-TNT, N = 8)</a:t>
+            </a:r>
+          </a:p>
+        </p:txBody>
+      </p:sp>
+      <p:sp>
+        <p:nvSpPr>
+          <p:cNvPr id="35" name="TextBox 34"/>
+          <p:cNvSpPr txBox="1"/>
+          <p:nvPr/>
+        </p:nvSpPr>
+        <p:spPr>
+          <a:xfrm>
+            <a:off x="182880" y="2724912"/>
+            <a:ext cx="868680" cy="292608"/>
+          </a:xfrm>
+          <a:prstGeom prst="rect">
+            <a:avLst/>
+          </a:prstGeom>
+          <a:noFill/>
+          <a:effectLst/>
+        </p:spPr>
+        <p:txBody>
+          <a:bodyPr wrap="square" lIns="0" rIns="0" tIns="0" bIns="0" anchor="t">
+            <a:spAutoFit/>
+          </a:bodyPr>
+          <a:lstStyle/>
+          <a:p>
+            <a:pPr algn="l"/>
+            <a:r>
+              <a:rPr sz="600" b="0" i="0">
+                <a:solidFill>
+                  <a:srgbClr val="555555"/>
+                </a:solidFill>
+                <a:latin typeface="Arial"/>
+              </a:rPr>
+              <a:t>7/7 signatures concordant with discovery · Tcell_infil MW P = 0.036</a:t>
+            </a:r>
+          </a:p>
+        </p:txBody>
+      </p:sp>
+      <p:sp>
+        <p:nvSpPr>
+          <p:cNvPr id="36" name="Rectangle 35"/>
+          <p:cNvSpPr/>
+          <p:nvPr/>
+        </p:nvSpPr>
+        <p:spPr>
+          <a:xfrm>
+            <a:off x="1097280" y="2569464"/>
+            <a:ext cx="3017520" cy="164592"/>
+          </a:xfrm>
+          <a:prstGeom prst="rect">
+            <a:avLst/>
+          </a:prstGeom>
+          <a:solidFill>
+            <a:srgbClr val="DDDDDD"/>
+          </a:solidFill>
+          <a:ln>
+            <a:noFill/>
+          </a:ln>
+          <a:effectLst/>
+        </p:spPr>
+        <p:style>
+          <a:lnRef idx="1">
+            <a:schemeClr val="accent1"/>
+          </a:lnRef>
+          <a:fillRef idx="3">
+            <a:schemeClr val="accent1"/>
+          </a:fillRef>
+          <a:effectRef idx="2">
+            <a:schemeClr val="accent1"/>
+          </a:effectRef>
+          <a:fontRef idx="minor">
+            <a:schemeClr val="lt1"/>
+          </a:fontRef>
+        </p:style>
+        <p:txBody>
+          <a:bodyPr rtlCol="0" anchor="ctr"/>
+          <a:lstStyle/>
+          <a:p>
+            <a:pPr algn="ctr"/>
+          </a:p>
+        </p:txBody>
+      </p:sp>
+      <p:sp>
+        <p:nvSpPr>
+          <p:cNvPr id="37" name="Rectangle 36"/>
+          <p:cNvSpPr/>
+          <p:nvPr/>
+        </p:nvSpPr>
+        <p:spPr>
+          <a:xfrm>
+            <a:off x="1097280" y="2569464"/>
+            <a:ext cx="3017520" cy="164592"/>
+          </a:xfrm>
+          <a:prstGeom prst="rect">
+            <a:avLst/>
+          </a:prstGeom>
+          <a:solidFill>
+            <a:srgbClr val="D4A300"/>
+          </a:solidFill>
+          <a:ln w="3810">
+            <a:solidFill>
+              <a:srgbClr val="FFFFFF"/>
+            </a:solidFill>
+          </a:ln>
+          <a:effectLst/>
+        </p:spPr>
+        <p:style>
+          <a:lnRef idx="1">
+            <a:schemeClr val="accent1"/>
+          </a:lnRef>
+          <a:fillRef idx="3">
+            <a:schemeClr val="accent1"/>
+          </a:fillRef>
+          <a:effectRef idx="2">
+            <a:schemeClr val="accent1"/>
+          </a:effectRef>
+          <a:fontRef idx="minor">
+            <a:schemeClr val="lt1"/>
+          </a:fontRef>
+        </p:style>
+        <p:txBody>
+          <a:bodyPr rtlCol="0" anchor="ctr"/>
+          <a:lstStyle/>
+          <a:p>
+            <a:pPr algn="ctr"/>
+          </a:p>
+        </p:txBody>
+      </p:sp>
+      <p:sp>
+        <p:nvSpPr>
+          <p:cNvPr id="38" name="TextBox 37"/>
+          <p:cNvSpPr txBox="1"/>
+          <p:nvPr/>
+        </p:nvSpPr>
+        <p:spPr>
+          <a:xfrm>
+            <a:off x="1097280" y="2752344"/>
+            <a:ext cx="3017520" cy="118872"/>
+          </a:xfrm>
+          <a:prstGeom prst="rect">
+            <a:avLst/>
+          </a:prstGeom>
+          <a:noFill/>
+          <a:effectLst/>
+        </p:spPr>
+        <p:txBody>
+          <a:bodyPr wrap="square" lIns="0" rIns="0" tIns="0" bIns="0" anchor="ctr">
+            <a:spAutoFit/>
+          </a:bodyPr>
+          <a:lstStyle/>
+          <a:p>
+            <a:pPr algn="l"/>
+            <a:r>
+              <a:rPr sz="500" b="0" i="1">
+                <a:solidFill>
+                  <a:srgbClr val="666666"/>
+                </a:solidFill>
+                <a:latin typeface="Arial"/>
+              </a:rPr>
+              <a:t>signature direction concordance  (7/7 = unanimous)</a:t>
+            </a:r>
+          </a:p>
+        </p:txBody>
+      </p:sp>
+      <p:sp>
+        <p:nvSpPr>
+          <p:cNvPr id="39" name="TextBox 38"/>
+          <p:cNvSpPr txBox="1"/>
+          <p:nvPr/>
+        </p:nvSpPr>
+        <p:spPr>
+          <a:xfrm>
+            <a:off x="4251960" y="2404872"/>
+            <a:ext cx="1188720" cy="201168"/>
+          </a:xfrm>
+          <a:prstGeom prst="rect">
+            <a:avLst/>
+          </a:prstGeom>
+          <a:noFill/>
+          <a:effectLst/>
+        </p:spPr>
+        <p:txBody>
+          <a:bodyPr wrap="square" lIns="0" rIns="0" tIns="0" bIns="0" anchor="ctr">
+            <a:spAutoFit/>
+          </a:bodyPr>
+          <a:lstStyle/>
+          <a:p>
+            <a:pPr algn="l"/>
+            <a:r>
+              <a:rPr sz="1400" b="1" i="0">
+                <a:solidFill>
+                  <a:srgbClr val="D4A300"/>
+                </a:solidFill>
+                <a:latin typeface="Arial"/>
+              </a:rPr>
+              <a:t>7/7</a:t>
+            </a:r>
+          </a:p>
+        </p:txBody>
+      </p:sp>
+      <p:sp>
+        <p:nvSpPr>
+          <p:cNvPr id="40" name="TextBox 39"/>
+          <p:cNvSpPr txBox="1"/>
+          <p:nvPr/>
+        </p:nvSpPr>
+        <p:spPr>
+          <a:xfrm>
+            <a:off x="4251960" y="2651760"/>
+            <a:ext cx="1280160" cy="146304"/>
+          </a:xfrm>
+          <a:prstGeom prst="rect">
+            <a:avLst/>
+          </a:prstGeom>
+          <a:noFill/>
+          <a:effectLst/>
+        </p:spPr>
+        <p:txBody>
+          <a:bodyPr wrap="square" lIns="0" rIns="0" tIns="0" bIns="0" anchor="ctr">
+            <a:spAutoFit/>
+          </a:bodyPr>
+          <a:lstStyle/>
+          <a:p>
+            <a:pPr algn="l"/>
+            <a:r>
+              <a:rPr sz="700" b="0" i="0">
+                <a:solidFill>
+                  <a:srgbClr val="555555"/>
+                </a:solidFill>
+                <a:latin typeface="Arial"/>
+              </a:rPr>
+              <a:t>sign P = 0.016</a:t>
+            </a:r>
+          </a:p>
+        </p:txBody>
+      </p:sp>
+      <p:sp>
+        <p:nvSpPr>
+          <p:cNvPr id="41" name="TextBox 40"/>
+          <p:cNvSpPr txBox="1"/>
+          <p:nvPr/>
+        </p:nvSpPr>
+        <p:spPr>
+          <a:xfrm>
+            <a:off x="4251960" y="2834640"/>
+            <a:ext cx="1280160" cy="146304"/>
+          </a:xfrm>
+          <a:prstGeom prst="rect">
+            <a:avLst/>
+          </a:prstGeom>
+          <a:noFill/>
+          <a:effectLst/>
+        </p:spPr>
+        <p:txBody>
+          <a:bodyPr wrap="square" lIns="0" rIns="0" tIns="0" bIns="0" anchor="ctr">
+            <a:spAutoFit/>
+          </a:bodyPr>
+          <a:lstStyle/>
+          <a:p>
+            <a:pPr algn="l"/>
+            <a:r>
+              <a:rPr sz="700" b="0" i="1">
+                <a:solidFill>
+                  <a:srgbClr val="D4A300"/>
+                </a:solidFill>
+                <a:latin typeface="Arial"/>
+              </a:rPr>
+              <a:t>→ Fig 9E</a:t>
+            </a:r>
+          </a:p>
+        </p:txBody>
+      </p:sp>
+      <p:cxnSp>
+        <p:nvCxnSpPr>
+          <p:cNvPr id="42" name="Connector 41"/>
+          <p:cNvCxnSpPr/>
+          <p:nvPr/>
+        </p:nvCxnSpPr>
+        <p:spPr>
+          <a:xfrm>
+            <a:off x="182880" y="2971800"/>
+            <a:ext cx="5577840" cy="0"/>
+          </a:xfrm>
+          <a:prstGeom prst="line">
+            <a:avLst/>
+          </a:prstGeom>
+          <a:ln w="3810">
+            <a:solidFill>
+              <a:srgbClr val="DDDDDD"/>
+            </a:solidFill>
+          </a:ln>
+          <a:effectLst/>
+        </p:spPr>
+        <p:style>
+          <a:lnRef idx="2">
+            <a:schemeClr val="accent1"/>
+          </a:lnRef>
+          <a:fillRef idx="0">
+            <a:schemeClr val="accent1"/>
+          </a:fillRef>
+          <a:effectRef idx="1">
+            <a:schemeClr val="accent1"/>
+          </a:effectRef>
+          <a:fontRef idx="minor">
+            <a:schemeClr val="tx1"/>
+          </a:fontRef>
+        </p:style>
+      </p:cxnSp>
+      <p:sp>
+        <p:nvSpPr>
+          <p:cNvPr id="43" name="TextBox 42"/>
+          <p:cNvSpPr txBox="1"/>
+          <p:nvPr/>
+        </p:nvSpPr>
+        <p:spPr>
+          <a:xfrm>
+            <a:off x="182880" y="3044952"/>
+            <a:ext cx="914400" cy="128016"/>
+          </a:xfrm>
+          <a:prstGeom prst="rect">
+            <a:avLst/>
+          </a:prstGeom>
+          <a:noFill/>
+          <a:effectLst/>
+        </p:spPr>
+        <p:txBody>
+          <a:bodyPr wrap="square" lIns="0" rIns="0" tIns="0" bIns="0" anchor="ctr">
+            <a:spAutoFit/>
+          </a:bodyPr>
+          <a:lstStyle/>
+          <a:p>
+            <a:pPr algn="l"/>
+            <a:r>
+              <a:rPr sz="600" b="1" i="0">
+                <a:solidFill>
+                  <a:srgbClr val="B37D00"/>
+                </a:solidFill>
+                <a:latin typeface="Arial"/>
+              </a:rPr>
               <a:t>PAIRED</a:t>
             </a:r>
           </a:p>
@@ -21880,13 +22732,13 @@
       </p:sp>
       <p:sp>
         <p:nvSpPr>
-          <p:cNvPr id="34" name="TextBox 33"/>
+          <p:cNvPr id="44" name="TextBox 43"/>
           <p:cNvSpPr txBox="1"/>
           <p:nvPr/>
         </p:nvSpPr>
         <p:spPr>
           <a:xfrm>
-            <a:off x="182880" y="2967228"/>
+            <a:off x="182880" y="3172968"/>
             <a:ext cx="868680" cy="182880"/>
           </a:xfrm>
           <a:prstGeom prst="rect">
@@ -21916,13 +22768,13 @@
       </p:sp>
       <p:sp>
         <p:nvSpPr>
-          <p:cNvPr id="35" name="TextBox 34"/>
+          <p:cNvPr id="45" name="TextBox 44"/>
           <p:cNvSpPr txBox="1"/>
           <p:nvPr/>
         </p:nvSpPr>
         <p:spPr>
           <a:xfrm>
-            <a:off x="182880" y="3159252"/>
+            <a:off x="182880" y="3364992"/>
             <a:ext cx="868680" cy="292608"/>
           </a:xfrm>
           <a:prstGeom prst="rect">
@@ -21952,13 +22804,13 @@
       </p:sp>
       <p:sp>
         <p:nvSpPr>
-          <p:cNvPr id="36" name="Rectangle 35"/>
-          <p:cNvSpPr/>
-          <p:nvPr/>
-        </p:nvSpPr>
-        <p:spPr>
-          <a:xfrm>
-            <a:off x="1097280" y="3060954"/>
+          <p:cNvPr id="46" name="Rectangle 45"/>
+          <p:cNvSpPr/>
+          <p:nvPr/>
+        </p:nvSpPr>
+        <p:spPr>
+          <a:xfrm>
+            <a:off x="1097280" y="3209544"/>
             <a:ext cx="3017520" cy="164592"/>
           </a:xfrm>
           <a:prstGeom prst="rect">
@@ -21996,20 +22848,20 @@
       </p:sp>
       <p:sp>
         <p:nvSpPr>
-          <p:cNvPr id="37" name="Rectangle 36"/>
-          <p:cNvSpPr/>
-          <p:nvPr/>
-        </p:nvSpPr>
-        <p:spPr>
-          <a:xfrm>
-            <a:off x="1097280" y="3060954"/>
+          <p:cNvPr id="47" name="Rectangle 46"/>
+          <p:cNvSpPr/>
+          <p:nvPr/>
+        </p:nvSpPr>
+        <p:spPr>
+          <a:xfrm>
+            <a:off x="1097280" y="3209544"/>
             <a:ext cx="1806368" cy="164592"/>
           </a:xfrm>
           <a:prstGeom prst="rect">
             <a:avLst/>
           </a:prstGeom>
           <a:solidFill>
-            <a:srgbClr val="D4A300"/>
+            <a:srgbClr val="B37D00"/>
           </a:solidFill>
           <a:ln w="3810">
             <a:solidFill>
@@ -22042,13 +22894,13 @@
       </p:sp>
       <p:sp>
         <p:nvSpPr>
-          <p:cNvPr id="38" name="TextBox 37"/>
+          <p:cNvPr id="48" name="TextBox 47"/>
           <p:cNvSpPr txBox="1"/>
           <p:nvPr/>
         </p:nvSpPr>
         <p:spPr>
           <a:xfrm>
-            <a:off x="1097280" y="3243834"/>
+            <a:off x="1097280" y="3392424"/>
             <a:ext cx="3017520" cy="118872"/>
           </a:xfrm>
           <a:prstGeom prst="rect">
@@ -22078,13 +22930,13 @@
       </p:sp>
       <p:sp>
         <p:nvSpPr>
-          <p:cNvPr id="39" name="TextBox 38"/>
+          <p:cNvPr id="49" name="TextBox 48"/>
           <p:cNvSpPr txBox="1"/>
           <p:nvPr/>
         </p:nvSpPr>
         <p:spPr>
           <a:xfrm>
-            <a:off x="4251960" y="2839212"/>
+            <a:off x="4251960" y="3044952"/>
             <a:ext cx="1188720" cy="201168"/>
           </a:xfrm>
           <a:prstGeom prst="rect">
@@ -22103,7 +22955,7 @@
             <a:r>
               <a:rPr sz="1400" b="1" i="0">
                 <a:solidFill>
-                  <a:srgbClr val="D4A300"/>
+                  <a:srgbClr val="B37D00"/>
                 </a:solidFill>
                 <a:latin typeface="Arial"/>
               </a:rPr>
@@ -22114,13 +22966,13 @@
       </p:sp>
       <p:sp>
         <p:nvSpPr>
-          <p:cNvPr id="40" name="TextBox 39"/>
+          <p:cNvPr id="50" name="TextBox 49"/>
           <p:cNvSpPr txBox="1"/>
           <p:nvPr/>
         </p:nvSpPr>
         <p:spPr>
           <a:xfrm>
-            <a:off x="4251960" y="3086100"/>
+            <a:off x="4251960" y="3291840"/>
             <a:ext cx="1280160" cy="146304"/>
           </a:xfrm>
           <a:prstGeom prst="rect">
@@ -22150,13 +23002,13 @@
       </p:sp>
       <p:sp>
         <p:nvSpPr>
-          <p:cNvPr id="41" name="TextBox 40"/>
+          <p:cNvPr id="51" name="TextBox 50"/>
           <p:cNvSpPr txBox="1"/>
           <p:nvPr/>
         </p:nvSpPr>
         <p:spPr>
           <a:xfrm>
-            <a:off x="4251960" y="3268980"/>
+            <a:off x="4251960" y="3474720"/>
             <a:ext cx="1280160" cy="146304"/>
           </a:xfrm>
           <a:prstGeom prst="rect">
@@ -22175,7 +23027,7 @@
             <a:r>
               <a:rPr sz="700" b="0" i="1">
                 <a:solidFill>
-                  <a:srgbClr val="D4A300"/>
+                  <a:srgbClr val="B37D00"/>
                 </a:solidFill>
                 <a:latin typeface="Arial"/>
               </a:rPr>
@@ -22186,14 +23038,14 @@
       </p:sp>
       <p:sp>
         <p:nvSpPr>
-          <p:cNvPr id="42" name="TextBox 41"/>
+          <p:cNvPr id="52" name="TextBox 51"/>
           <p:cNvSpPr txBox="1"/>
           <p:nvPr/>
         </p:nvSpPr>
         <p:spPr>
           <a:xfrm>
-            <a:off x="137160" y="3657600"/>
-            <a:ext cx="5669280" cy="146304"/>
+            <a:off x="137160" y="3675887"/>
+            <a:ext cx="5669280" cy="128016"/>
           </a:xfrm>
           <a:prstGeom prst="rect">
             <a:avLst/>
@@ -22215,21 +23067,21 @@
                 </a:solidFill>
                 <a:latin typeface="Arial"/>
               </a:rPr>
-              <a:t>Two externally-validated orthogonal pre-CRT axes (Thread 1 tumor-intrinsic + Thread 2 immune) reproduce across a chemo-timing axis, supporting a regimen-agnostic interpretation;</a:t>
+              <a:t>Two externally-validated orthogonal pre-CRT axes (Thread 1 tumor-intrinsic + Thread 2 immune) reproduce across</a:t>
             </a:r>
           </a:p>
         </p:txBody>
       </p:sp>
       <p:sp>
         <p:nvSpPr>
-          <p:cNvPr id="43" name="TextBox 42"/>
+          <p:cNvPr id="53" name="TextBox 52"/>
           <p:cNvSpPr txBox="1"/>
           <p:nvPr/>
         </p:nvSpPr>
         <p:spPr>
           <a:xfrm>
-            <a:off x="137160" y="3794760"/>
-            <a:ext cx="5669280" cy="146304"/>
+            <a:off x="137160" y="3803904"/>
+            <a:ext cx="5669280" cy="128016"/>
           </a:xfrm>
           <a:prstGeom prst="rect">
             <a:avLst/>
@@ -22251,21 +23103,21 @@
                 </a:solidFill>
                 <a:latin typeface="Arial"/>
               </a:rPr>
-              <a:t>paired radiation-phase biopsies add an orthogonal dynamic layer (target engagement + directional immune coherence).</a:t>
+              <a:t>three regimen strata (SC-RT + FOLFOX/CAPOX; LC-CRT + concurrent cape; SC-RT + FOLFOXIRI), supporting a regimen-agnostic interpretation;</a:t>
             </a:r>
           </a:p>
         </p:txBody>
       </p:sp>
       <p:sp>
         <p:nvSpPr>
-          <p:cNvPr id="44" name="TextBox 43"/>
+          <p:cNvPr id="54" name="TextBox 53"/>
           <p:cNvSpPr txBox="1"/>
           <p:nvPr/>
         </p:nvSpPr>
         <p:spPr>
           <a:xfrm>
             <a:off x="137160" y="3931920"/>
-            <a:ext cx="5669280" cy="146304"/>
+            <a:ext cx="5669280" cy="128016"/>
           </a:xfrm>
           <a:prstGeom prst="rect">
             <a:avLst/>
@@ -22287,7 +23139,7 @@
                 </a:solidFill>
                 <a:latin typeface="Arial"/>
               </a:rPr>
-              <a:t>Two-layer clinical algorithm: pre-CRT stratification at diagnosis + mid-treatment coherence read at RT → consolidation.</a:t>
+              <a:t>paired radiation-phase biopsies add an orthogonal dynamic layer (target engagement + directional immune coherence).</a:t>
             </a:r>
           </a:p>
         </p:txBody>
